--- a/Last/LEC/06-1_TSReliablity.pptx
+++ b/Last/LEC/06-1_TSReliablity.pptx
@@ -224,7 +224,7 @@
           <a:p>
             <a:fld id="{C730246F-5962-E14A-AAF2-985CCFDAC345}" type="datetimeFigureOut">
               <a:rPr lang="ru-RU" smtClean="0"/>
-              <a:t>09.04.2026</a:t>
+              <a:t>15.05.2026</a:t>
             </a:fld>
             <a:endParaRPr lang="ru-RU"/>
           </a:p>
@@ -3170,7 +3170,7 @@
           <a:p>
             <a:fld id="{44343DC6-30E4-4569-999A-C703F926F2AF}" type="datetimeFigureOut">
               <a:rPr lang="en-US" smtClean="0"/>
-              <a:t>4/9/2026</a:t>
+              <a:t>5/15/26</a:t>
             </a:fld>
             <a:endParaRPr lang="en-US"/>
           </a:p>
@@ -3370,7 +3370,7 @@
           <a:p>
             <a:fld id="{44343DC6-30E4-4569-999A-C703F926F2AF}" type="datetimeFigureOut">
               <a:rPr lang="en-US" smtClean="0"/>
-              <a:t>4/9/2026</a:t>
+              <a:t>5/15/26</a:t>
             </a:fld>
             <a:endParaRPr lang="en-US"/>
           </a:p>
@@ -3580,7 +3580,7 @@
           <a:p>
             <a:fld id="{44343DC6-30E4-4569-999A-C703F926F2AF}" type="datetimeFigureOut">
               <a:rPr lang="en-US" smtClean="0"/>
-              <a:t>4/9/2026</a:t>
+              <a:t>5/15/26</a:t>
             </a:fld>
             <a:endParaRPr lang="en-US"/>
           </a:p>
@@ -3780,7 +3780,7 @@
           <a:p>
             <a:fld id="{44343DC6-30E4-4569-999A-C703F926F2AF}" type="datetimeFigureOut">
               <a:rPr lang="en-US" smtClean="0"/>
-              <a:t>4/9/2026</a:t>
+              <a:t>5/15/26</a:t>
             </a:fld>
             <a:endParaRPr lang="en-US"/>
           </a:p>
@@ -4056,7 +4056,7 @@
           <a:p>
             <a:fld id="{44343DC6-30E4-4569-999A-C703F926F2AF}" type="datetimeFigureOut">
               <a:rPr lang="en-US" smtClean="0"/>
-              <a:t>4/9/2026</a:t>
+              <a:t>5/15/26</a:t>
             </a:fld>
             <a:endParaRPr lang="en-US"/>
           </a:p>
@@ -4324,7 +4324,7 @@
           <a:p>
             <a:fld id="{44343DC6-30E4-4569-999A-C703F926F2AF}" type="datetimeFigureOut">
               <a:rPr lang="en-US" smtClean="0"/>
-              <a:t>4/9/2026</a:t>
+              <a:t>5/15/26</a:t>
             </a:fld>
             <a:endParaRPr lang="en-US"/>
           </a:p>
@@ -4739,7 +4739,7 @@
           <a:p>
             <a:fld id="{44343DC6-30E4-4569-999A-C703F926F2AF}" type="datetimeFigureOut">
               <a:rPr lang="en-US" smtClean="0"/>
-              <a:t>4/9/2026</a:t>
+              <a:t>5/15/26</a:t>
             </a:fld>
             <a:endParaRPr lang="en-US"/>
           </a:p>
@@ -4881,7 +4881,7 @@
           <a:p>
             <a:fld id="{44343DC6-30E4-4569-999A-C703F926F2AF}" type="datetimeFigureOut">
               <a:rPr lang="en-US" smtClean="0"/>
-              <a:t>4/9/2026</a:t>
+              <a:t>5/15/26</a:t>
             </a:fld>
             <a:endParaRPr lang="en-US"/>
           </a:p>
@@ -4994,7 +4994,7 @@
           <a:p>
             <a:fld id="{44343DC6-30E4-4569-999A-C703F926F2AF}" type="datetimeFigureOut">
               <a:rPr lang="en-US" smtClean="0"/>
-              <a:t>4/9/2026</a:t>
+              <a:t>5/15/26</a:t>
             </a:fld>
             <a:endParaRPr lang="en-US"/>
           </a:p>
@@ -5307,7 +5307,7 @@
           <a:p>
             <a:fld id="{44343DC6-30E4-4569-999A-C703F926F2AF}" type="datetimeFigureOut">
               <a:rPr lang="en-US" smtClean="0"/>
-              <a:t>4/9/2026</a:t>
+              <a:t>5/15/26</a:t>
             </a:fld>
             <a:endParaRPr lang="en-US"/>
           </a:p>
@@ -5596,7 +5596,7 @@
           <a:p>
             <a:fld id="{44343DC6-30E4-4569-999A-C703F926F2AF}" type="datetimeFigureOut">
               <a:rPr lang="en-US" smtClean="0"/>
-              <a:t>4/9/2026</a:t>
+              <a:t>5/15/26</a:t>
             </a:fld>
             <a:endParaRPr lang="en-US"/>
           </a:p>
@@ -5839,7 +5839,7 @@
           <a:p>
             <a:fld id="{44343DC6-30E4-4569-999A-C703F926F2AF}" type="datetimeFigureOut">
               <a:rPr lang="en-US" smtClean="0"/>
-              <a:t>4/9/2026</a:t>
+              <a:t>5/15/26</a:t>
             </a:fld>
             <a:endParaRPr lang="en-US"/>
           </a:p>
@@ -6307,13 +6307,6 @@
   <p:clrMapOvr>
     <a:masterClrMapping/>
   </p:clrMapOvr>
-  <p:timing>
-    <p:tnLst>
-      <p:par>
-        <p:cTn id="1" dur="indefinite" restart="never" nodeType="tmRoot"/>
-      </p:par>
-    </p:tnLst>
-  </p:timing>
 </p:sld>
 </file>
 
@@ -6736,13 +6729,6 @@
   <p:clrMapOvr>
     <a:masterClrMapping/>
   </p:clrMapOvr>
-  <p:timing>
-    <p:tnLst>
-      <p:par>
-        <p:cTn id="1" dur="indefinite" restart="never" nodeType="tmRoot"/>
-      </p:par>
-    </p:tnLst>
-  </p:timing>
 </p:sld>
 </file>
 
@@ -6964,13 +6950,6 @@
   <p:clrMapOvr>
     <a:masterClrMapping/>
   </p:clrMapOvr>
-  <p:timing>
-    <p:tnLst>
-      <p:par>
-        <p:cTn id="1" dur="indefinite" restart="never" nodeType="tmRoot"/>
-      </p:par>
-    </p:tnLst>
-  </p:timing>
 </p:sld>
 </file>
 
@@ -7014,18 +6993,17 @@
           <a:lstStyle/>
           <a:p>
             <a:r>
-              <a:rPr lang="ru-RU" sz="3600" dirty="0" smtClean="0"/>
+              <a:rPr lang="ru-RU" sz="3600" dirty="0"/>
               <a:t>Замечание. </a:t>
             </a:r>
             <a:r>
-              <a:rPr lang="en-US" sz="3600" dirty="0" err="1" smtClean="0"/>
+              <a:rPr lang="en-US" sz="3600" dirty="0" err="1"/>
               <a:t>Backcast</a:t>
             </a:r>
             <a:r>
-              <a:rPr lang="ru-RU" sz="3600" dirty="0" smtClean="0"/>
+              <a:rPr lang="ru-RU" sz="3600" dirty="0"/>
               <a:t>-дополнительная оценка надежности</a:t>
             </a:r>
-            <a:endParaRPr lang="ru-RU" sz="3600" dirty="0"/>
           </a:p>
         </p:txBody>
       </p:sp>
@@ -7055,26 +7033,25 @@
               <a:buNone/>
             </a:pPr>
             <a:r>
-              <a:rPr lang="ru-RU" sz="2200" dirty="0" smtClean="0"/>
+              <a:rPr lang="ru-RU" sz="2200" dirty="0"/>
               <a:t>Если ВР стационарный или как минимум регулярный, то оценку точности предсказания вперед </a:t>
             </a:r>
             <a:r>
-              <a:rPr lang="en-US" sz="2200" dirty="0" smtClean="0"/>
+              <a:rPr lang="en-US" sz="2200" dirty="0"/>
               <a:t>(forecast)</a:t>
             </a:r>
             <a:r>
-              <a:rPr lang="ru-RU" sz="2200" dirty="0" smtClean="0"/>
+              <a:rPr lang="ru-RU" sz="2200" dirty="0"/>
               <a:t> можно скорректировать оценкой точности ретроспективного предсказания (предсказания назад </a:t>
             </a:r>
             <a:r>
-              <a:rPr lang="en-US" sz="2200" dirty="0" err="1" smtClean="0"/>
+              <a:rPr lang="en-US" sz="2200" dirty="0" err="1"/>
               <a:t>Backcast</a:t>
             </a:r>
             <a:r>
-              <a:rPr lang="ru-RU" sz="2200" dirty="0" smtClean="0"/>
+              <a:rPr lang="ru-RU" sz="2200" dirty="0"/>
               <a:t>).</a:t>
             </a:r>
-            <a:endParaRPr lang="ru-RU" sz="2200" dirty="0"/>
           </a:p>
         </p:txBody>
       </p:sp>
@@ -7391,7 +7368,7 @@
               <a:buNone/>
             </a:pPr>
             <a:r>
-              <a:rPr lang="ru-RU" sz="2200" dirty="0" smtClean="0"/>
+              <a:rPr lang="ru-RU" sz="2200" dirty="0"/>
               <a:t>Ретроспективный анализ будет работать если паттерны поведения остаются прежними!</a:t>
             </a:r>
           </a:p>
@@ -7401,10 +7378,9 @@
               <a:buNone/>
             </a:pPr>
             <a:r>
-              <a:rPr lang="ru-RU" sz="2200" dirty="0" smtClean="0"/>
+              <a:rPr lang="ru-RU" sz="2200" dirty="0"/>
               <a:t> </a:t>
             </a:r>
-            <a:endParaRPr lang="ru-RU" sz="2200" dirty="0"/>
           </a:p>
         </p:txBody>
       </p:sp>
@@ -7418,13 +7394,6 @@
   <p:clrMapOvr>
     <a:masterClrMapping/>
   </p:clrMapOvr>
-  <p:timing>
-    <p:tnLst>
-      <p:par>
-        <p:cTn id="1" dur="indefinite" restart="never" nodeType="tmRoot"/>
-      </p:par>
-    </p:tnLst>
-  </p:timing>
 </p:sld>
 </file>
 
@@ -7501,15 +7470,15 @@
               <a:buNone/>
             </a:pPr>
             <a:r>
-              <a:rPr lang="ru-RU" sz="2100" b="1" dirty="0" smtClean="0"/>
+              <a:rPr lang="ru-RU" sz="2100" b="1" dirty="0"/>
               <a:t>При кросс-</a:t>
             </a:r>
             <a:r>
-              <a:rPr lang="ru-RU" sz="2100" b="1" dirty="0" err="1" smtClean="0"/>
+              <a:rPr lang="ru-RU" sz="2100" b="1" dirty="0" err="1"/>
               <a:t>валидации</a:t>
             </a:r>
             <a:r>
-              <a:rPr lang="ru-RU" sz="2100" b="1" dirty="0" smtClean="0"/>
+              <a:rPr lang="ru-RU" sz="2100" b="1" dirty="0"/>
               <a:t> важно оценивать неопределенность предсказания!</a:t>
             </a:r>
           </a:p>
@@ -7518,22 +7487,17 @@
               <a:buNone/>
             </a:pPr>
             <a:r>
-              <a:rPr lang="ru-RU" sz="2100" b="1" dirty="0" smtClean="0"/>
+              <a:rPr lang="ru-RU" sz="2100" b="1" dirty="0"/>
               <a:t>Это диагностика того как модель описывает ряд и какие ошибки есть во ВР</a:t>
             </a:r>
-            <a:endParaRPr lang="ru-RU" sz="2100" b="1" dirty="0" smtClean="0"/>
           </a:p>
           <a:p>
             <a:pPr marL="0" indent="0">
               <a:buNone/>
             </a:pPr>
             <a:r>
-              <a:rPr lang="ru-RU" sz="2100" b="1" dirty="0" smtClean="0"/>
-              <a:t>Источники </a:t>
-            </a:r>
-            <a:r>
               <a:rPr lang="ru-RU" sz="2100" b="1" dirty="0"/>
-              <a:t>ошибки предсказаний</a:t>
+              <a:t>Источники ошибки предсказаний</a:t>
             </a:r>
           </a:p>
           <a:p>
@@ -7892,13 +7856,6 @@
   <p:clrMapOvr>
     <a:masterClrMapping/>
   </p:clrMapOvr>
-  <p:timing>
-    <p:tnLst>
-      <p:par>
-        <p:cTn id="1" dur="indefinite" restart="never" nodeType="tmRoot"/>
-      </p:par>
-    </p:tnLst>
-  </p:timing>
 </p:sld>
 </file>
 
@@ -7949,8 +7906,8 @@
           </a:p>
         </p:txBody>
       </p:sp>
-      <mc:AlternateContent xmlns:mc="http://schemas.openxmlformats.org/markup-compatibility/2006">
-        <mc:Choice xmlns:a14="http://schemas.microsoft.com/office/drawing/2010/main" Requires="a14">
+      <mc:AlternateContent xmlns:mc="http://schemas.openxmlformats.org/markup-compatibility/2006" xmlns:a14="http://schemas.microsoft.com/office/drawing/2010/main">
+        <mc:Choice Requires="a14">
           <p:sp>
             <p:nvSpPr>
               <p:cNvPr id="3" name="Объект 2"/>
@@ -8019,28 +7976,23 @@
                 </a:r>
                 <a:r>
                   <a:rPr lang="ru-RU" sz="1700" dirty="0"/>
-                  <a:t> – индикатор переобучения</a:t>
-                </a:r>
-                <a:r>
-                  <a:rPr lang="ru-RU" sz="1700" dirty="0" smtClean="0"/>
-                  <a:t>.</a:t>
+                  <a:t> – индикатор переобучения.</a:t>
                 </a:r>
               </a:p>
               <a:p>
                 <a:pPr lvl="1"/>
                 <a:r>
-                  <a:rPr lang="ru-RU" sz="1700" dirty="0" smtClean="0"/>
+                  <a:rPr lang="ru-RU" sz="1700" dirty="0"/>
                   <a:t>Но при условии корректного покрытия (т.е. модель, дающая 5% для </a:t>
                 </a:r>
                 <a:r>
-                  <a:rPr lang="ru-RU" sz="1700" dirty="0" err="1" smtClean="0"/>
+                  <a:rPr lang="ru-RU" sz="1700" dirty="0" err="1"/>
                   <a:t>сбытия</a:t>
                 </a:r>
                 <a:r>
-                  <a:rPr lang="ru-RU" sz="1700" dirty="0" smtClean="0"/>
+                  <a:rPr lang="ru-RU" sz="1700" dirty="0"/>
                   <a:t> с вер. 5%, лучше, чем модель, дающая для него 1 или 10%).</a:t>
                 </a:r>
-                <a:endParaRPr lang="ru-RU" sz="1700" dirty="0"/>
               </a:p>
               <a:p>
                 <a:r>
@@ -8140,7 +8092,7 @@
             </p:txBody>
           </p:sp>
         </mc:Choice>
-        <mc:Fallback>
+        <mc:Fallback xmlns="">
           <p:sp>
             <p:nvSpPr>
               <p:cNvPr id="3" name="Объект 2"/>
@@ -8470,13 +8422,6 @@
   <p:clrMapOvr>
     <a:masterClrMapping/>
   </p:clrMapOvr>
-  <p:timing>
-    <p:tnLst>
-      <p:par>
-        <p:cTn id="1" dur="indefinite" restart="never" nodeType="tmRoot"/>
-      </p:par>
-    </p:tnLst>
-  </p:timing>
 </p:sld>
 </file>
 
@@ -8991,13 +8936,6 @@
   <p:clrMapOvr>
     <a:masterClrMapping/>
   </p:clrMapOvr>
-  <p:timing>
-    <p:tnLst>
-      <p:par>
-        <p:cTn id="1" dur="indefinite" restart="never" nodeType="tmRoot"/>
-      </p:par>
-    </p:tnLst>
-  </p:timing>
 </p:sld>
 </file>
 
@@ -9113,9 +9051,7 @@
               <p:cNvGraphicFramePr>
                 <a:graphicFrameLocks noGrp="1"/>
               </p:cNvGraphicFramePr>
-              <p:nvPr>
-                <p:extLst/>
-              </p:nvPr>
+              <p:nvPr/>
             </p:nvGraphicFramePr>
             <p:xfrm>
               <a:off x="310896" y="1652705"/>
@@ -12072,13 +12008,6 @@
   <p:clrMapOvr>
     <a:masterClrMapping/>
   </p:clrMapOvr>
-  <p:timing>
-    <p:tnLst>
-      <p:par>
-        <p:cTn id="1" dur="indefinite" restart="never" nodeType="tmRoot"/>
-      </p:par>
-    </p:tnLst>
-  </p:timing>
 </p:sld>
 </file>
 
@@ -12129,8 +12058,8 @@
           </a:p>
         </p:txBody>
       </p:sp>
-      <mc:AlternateContent xmlns:mc="http://schemas.openxmlformats.org/markup-compatibility/2006">
-        <mc:Choice xmlns:a14="http://schemas.microsoft.com/office/drawing/2010/main" Requires="a14">
+      <mc:AlternateContent xmlns:mc="http://schemas.openxmlformats.org/markup-compatibility/2006" xmlns:a14="http://schemas.microsoft.com/office/drawing/2010/main">
+        <mc:Choice Requires="a14">
           <p:sp>
             <p:nvSpPr>
               <p:cNvPr id="3" name="Объект 2"/>
@@ -12166,24 +12095,16 @@
                   <a:buNone/>
                 </a:pPr>
                 <a:r>
-                  <a:rPr lang="ru-RU" sz="2100" b="1" dirty="0" err="1" smtClean="0"/>
+                  <a:rPr lang="ru-RU" sz="2100" b="1" dirty="0" err="1"/>
                   <a:t>Нативно</a:t>
                 </a:r>
                 <a:r>
                   <a:rPr lang="ru-RU" sz="2100" b="1" dirty="0"/>
-                  <a:t> </a:t>
-                </a:r>
-                <a:r>
-                  <a:rPr lang="ru-RU" sz="2100" b="1" dirty="0" smtClean="0"/>
-                  <a:t>(параметрические)</a:t>
-                </a:r>
-                <a:r>
-                  <a:rPr lang="ru-RU" sz="2100" dirty="0" smtClean="0"/>
-                  <a:t>: </a:t>
+                  <a:t> (параметрические)</a:t>
                 </a:r>
                 <a:r>
                   <a:rPr lang="ru-RU" sz="2100" dirty="0"/>
-                  <a:t>Например </a:t>
+                  <a:t>: Например </a:t>
                 </a:r>
                 <a:r>
                   <a:rPr lang="en-US" sz="2100" dirty="0"/>
@@ -12210,13 +12131,8 @@
                 <a:pPr lvl="1"/>
                 <a:r>
                   <a:rPr lang="ru-RU" sz="2500" dirty="0"/>
-                  <a:t>такие оценки предполагают, что остатки имеют заданное распределение, напр. </a:t>
+                  <a:t>такие оценки предполагают, что остатки имеют заданное распределение, напр. нормальное (оно заложено в модели).</a:t>
                 </a:r>
-                <a:r>
-                  <a:rPr lang="ru-RU" sz="2500" dirty="0" smtClean="0"/>
-                  <a:t>нормальное (оно заложено в модели).</a:t>
-                </a:r>
-                <a:endParaRPr lang="ru-RU" sz="2500" dirty="0"/>
               </a:p>
               <a:p>
                 <a:pPr marL="1371600" lvl="3" indent="0">
@@ -12569,19 +12485,15 @@
                   <a:buNone/>
                 </a:pPr>
                 <a:r>
-                  <a:rPr lang="ru-RU" sz="2500" b="1" dirty="0" smtClean="0"/>
+                  <a:rPr lang="ru-RU" sz="2500" b="1" dirty="0"/>
                   <a:t>Из данных (не параметрические):</a:t>
                 </a:r>
               </a:p>
               <a:p>
                 <a:pPr lvl="1"/>
                 <a:r>
-                  <a:rPr lang="ru-RU" sz="2100" dirty="0" smtClean="0"/>
-                  <a:t>Путем </a:t>
-                </a:r>
-                <a:r>
                   <a:rPr lang="ru-RU" sz="2100" dirty="0"/>
-                  <a:t>ассиметричной регрессии (</a:t>
+                  <a:t>Путем ассиметричной регрессии (</a:t>
                 </a:r>
                 <a:r>
                   <a:rPr lang="ru-RU" sz="2100" b="1" dirty="0" err="1"/>
@@ -12637,7 +12549,7 @@
             </p:txBody>
           </p:sp>
         </mc:Choice>
-        <mc:Fallback>
+        <mc:Fallback xmlns="">
           <p:sp>
             <p:nvSpPr>
               <p:cNvPr id="3" name="Объект 2"/>
@@ -12875,13 +12787,6 @@
   <p:clrMapOvr>
     <a:masterClrMapping/>
   </p:clrMapOvr>
-  <p:timing>
-    <p:tnLst>
-      <p:par>
-        <p:cTn id="1" dur="indefinite" restart="never" nodeType="tmRoot"/>
-      </p:par>
-    </p:tnLst>
-  </p:timing>
 </p:sld>
 </file>
 
@@ -13338,16 +13243,12 @@
               <a:t> </a:t>
             </a:r>
             <a:r>
-              <a:rPr lang="ru-RU" sz="2400" b="1" dirty="0" smtClean="0"/>
+              <a:rPr lang="ru-RU" sz="2400" b="1" dirty="0"/>
               <a:t>ВР </a:t>
             </a:r>
             <a:r>
-              <a:rPr lang="ru-RU" sz="2400" dirty="0" smtClean="0"/>
+              <a:rPr lang="ru-RU" sz="2400" dirty="0"/>
               <a:t>– </a:t>
-            </a:r>
-            <a:r>
-              <a:rPr lang="ru-RU" sz="2400" dirty="0"/>
-              <a:t/>
             </a:r>
             <a:br>
               <a:rPr lang="ru-RU" sz="2400" dirty="0"/>
@@ -13480,13 +13381,6 @@
   <p:clrMapOvr>
     <a:masterClrMapping/>
   </p:clrMapOvr>
-  <p:timing>
-    <p:tnLst>
-      <p:par>
-        <p:cTn id="1" dur="indefinite" restart="never" nodeType="tmRoot"/>
-      </p:par>
-    </p:tnLst>
-  </p:timing>
 </p:sld>
 </file>
 
@@ -16768,13 +16662,6 @@
   <p:clrMapOvr>
     <a:masterClrMapping/>
   </p:clrMapOvr>
-  <p:timing>
-    <p:tnLst>
-      <p:par>
-        <p:cTn id="1" dur="indefinite" restart="never" nodeType="tmRoot"/>
-      </p:par>
-    </p:tnLst>
-  </p:timing>
 </p:sld>
 </file>
 
@@ -17293,13 +17180,6 @@
   <p:clrMapOvr>
     <a:masterClrMapping/>
   </p:clrMapOvr>
-  <p:timing>
-    <p:tnLst>
-      <p:par>
-        <p:cTn id="1" dur="indefinite" restart="never" nodeType="tmRoot"/>
-      </p:par>
-    </p:tnLst>
-  </p:timing>
 </p:sld>
 </file>
 
@@ -20755,13 +20635,6 @@
   <p:clrMapOvr>
     <a:masterClrMapping/>
   </p:clrMapOvr>
-  <p:timing>
-    <p:tnLst>
-      <p:par>
-        <p:cTn id="1" dur="indefinite" restart="never" nodeType="tmRoot"/>
-      </p:par>
-    </p:tnLst>
-  </p:timing>
 </p:sld>
 </file>
 
@@ -21060,13 +20933,7 @@
                         <a:rPr lang="ru-RU" sz="2000" u="none" strike="noStrike" dirty="0">
                           <a:effectLst/>
                         </a:rPr>
-                        <a:t>может давать широкие </a:t>
-                      </a:r>
-                      <a:r>
-                        <a:rPr lang="ru-RU" sz="2000" u="none" strike="noStrike" dirty="0" smtClean="0">
-                          <a:effectLst/>
-                        </a:rPr>
-                        <a:t>интервалы</a:t>
+                        <a:t>может давать широкие интервалы</a:t>
                       </a:r>
                     </a:p>
                     <a:p>
@@ -21075,7 +20942,7 @@
                         <a:buChar char="•"/>
                       </a:pPr>
                       <a:r>
-                        <a:rPr lang="ru-RU" sz="2000" b="0" i="0" u="none" strike="noStrike" dirty="0" smtClean="0">
+                        <a:rPr lang="ru-RU" sz="2000" b="0" i="0" u="none" strike="noStrike" dirty="0">
                           <a:solidFill>
                             <a:srgbClr val="000000"/>
                           </a:solidFill>
@@ -21085,7 +20952,7 @@
                         <a:t>Работает если тест и </a:t>
                       </a:r>
                       <a:r>
-                        <a:rPr lang="ru-RU" sz="2000" b="0" i="0" u="none" strike="noStrike" dirty="0" err="1" smtClean="0">
+                        <a:rPr lang="ru-RU" sz="2000" b="0" i="0" u="none" strike="noStrike" dirty="0" err="1">
                           <a:solidFill>
                             <a:srgbClr val="000000"/>
                           </a:solidFill>
@@ -21095,7 +20962,7 @@
                         <a:t>калиб</a:t>
                       </a:r>
                       <a:r>
-                        <a:rPr lang="ru-RU" sz="2000" b="0" i="0" u="none" strike="noStrike" dirty="0" smtClean="0">
+                        <a:rPr lang="ru-RU" sz="2000" b="0" i="0" u="none" strike="noStrike" dirty="0">
                           <a:solidFill>
                             <a:srgbClr val="000000"/>
                           </a:solidFill>
@@ -21105,7 +20972,7 @@
                         <a:t> </a:t>
                       </a:r>
                       <a:r>
-                        <a:rPr lang="ru-RU" sz="2000" b="0" i="0" u="none" strike="noStrike" dirty="0" err="1" smtClean="0">
+                        <a:rPr lang="ru-RU" sz="2000" b="0" i="0" u="none" strike="noStrike" dirty="0" err="1">
                           <a:solidFill>
                             <a:srgbClr val="000000"/>
                           </a:solidFill>
@@ -21364,17 +21231,7 @@
                           <a:effectLst/>
                           <a:latin typeface="Calibri" panose="020F0502020204030204" pitchFamily="34" charset="0"/>
                         </a:rPr>
-                        <a:t>Зависит от </a:t>
-                      </a:r>
-                      <a:r>
-                        <a:rPr lang="ru-RU" sz="2000" b="0" i="0" u="none" strike="noStrike" dirty="0" smtClean="0">
-                          <a:solidFill>
-                            <a:srgbClr val="000000"/>
-                          </a:solidFill>
-                          <a:effectLst/>
-                          <a:latin typeface="Calibri" panose="020F0502020204030204" pitchFamily="34" charset="0"/>
-                        </a:rPr>
-                        <a:t>метрики</a:t>
+                        <a:t>Зависит от метрики</a:t>
                       </a:r>
                     </a:p>
                     <a:p>
@@ -21383,7 +21240,7 @@
                         <a:buChar char="•"/>
                       </a:pPr>
                       <a:r>
-                        <a:rPr lang="ru-RU" sz="2000" b="0" i="0" u="none" strike="noStrike" dirty="0" smtClean="0">
+                        <a:rPr lang="ru-RU" sz="2000" b="0" i="0" u="none" strike="noStrike" dirty="0">
                           <a:solidFill>
                             <a:srgbClr val="000000"/>
                           </a:solidFill>
@@ -21393,7 +21250,7 @@
                         <a:t>Только экстремальные</a:t>
                       </a:r>
                       <a:r>
-                        <a:rPr lang="ru-RU" sz="2000" b="0" i="0" u="none" strike="noStrike" baseline="0" dirty="0" smtClean="0">
+                        <a:rPr lang="ru-RU" sz="2000" b="0" i="0" u="none" strike="noStrike" baseline="0" dirty="0">
                           <a:solidFill>
                             <a:srgbClr val="000000"/>
                           </a:solidFill>
@@ -21595,13 +21452,6 @@
   <p:clrMapOvr>
     <a:masterClrMapping/>
   </p:clrMapOvr>
-  <p:timing>
-    <p:tnLst>
-      <p:par>
-        <p:cTn id="1" dur="indefinite" restart="never" nodeType="tmRoot"/>
-      </p:par>
-    </p:tnLst>
-  </p:timing>
 </p:sld>
 </file>
 
@@ -21930,11 +21780,7 @@
             </a:r>
             <a:r>
               <a:rPr lang="ru-RU" sz="2100" dirty="0"/>
-              <a:t>новизна в </a:t>
-            </a:r>
-            <a:r>
-              <a:rPr lang="ru-RU" sz="2100" dirty="0" smtClean="0"/>
-              <a:t>данных (новое распределение – результат).</a:t>
+              <a:t>новизна в данных (новое распределение – результат).</a:t>
             </a:r>
             <a:endParaRPr lang="en-US" sz="2100" dirty="0"/>
           </a:p>
@@ -21961,40 +21807,30 @@
           <a:p>
             <a:r>
               <a:rPr lang="ru-RU" sz="2300" dirty="0"/>
-              <a:t>Мониторинг входных  данных и результатов </a:t>
-            </a:r>
-            <a:r>
-              <a:rPr lang="ru-RU" sz="2300" dirty="0" smtClean="0"/>
-              <a:t>предсказания (</a:t>
-            </a:r>
-            <a:r>
-              <a:rPr lang="ru-RU" sz="2300" dirty="0" err="1" smtClean="0"/>
+              <a:t>Мониторинг входных  данных и результатов предсказания (</a:t>
+            </a:r>
+            <a:r>
+              <a:rPr lang="ru-RU" sz="2300" dirty="0" err="1"/>
               <a:t>сат.тесты</a:t>
             </a:r>
             <a:r>
-              <a:rPr lang="ru-RU" sz="2300" dirty="0" smtClean="0"/>
+              <a:rPr lang="ru-RU" sz="2300" dirty="0"/>
               <a:t>)</a:t>
             </a:r>
-            <a:endParaRPr lang="ru-RU" sz="2300" dirty="0"/>
           </a:p>
           <a:p>
             <a:r>
               <a:rPr lang="ru-RU" sz="2300" dirty="0"/>
-              <a:t>Обучение новых моделей по </a:t>
-            </a:r>
-            <a:r>
-              <a:rPr lang="ru-RU" sz="2300" dirty="0" smtClean="0"/>
-              <a:t>расписанию (мл </a:t>
-            </a:r>
-            <a:r>
-              <a:rPr lang="ru-RU" sz="2300" dirty="0" err="1" smtClean="0"/>
+              <a:t>Обучение новых моделей по расписанию (мл </a:t>
+            </a:r>
+            <a:r>
+              <a:rPr lang="ru-RU" sz="2300" dirty="0" err="1"/>
               <a:t>опс</a:t>
             </a:r>
             <a:r>
-              <a:rPr lang="ru-RU" sz="2300" dirty="0" smtClean="0"/>
+              <a:rPr lang="ru-RU" sz="2300" dirty="0"/>
               <a:t>)</a:t>
             </a:r>
-            <a:endParaRPr lang="ru-RU" sz="2300" dirty="0"/>
           </a:p>
           <a:p>
             <a:pPr marL="0" indent="0">
@@ -22053,13 +21889,6 @@
   <p:clrMapOvr>
     <a:masterClrMapping/>
   </p:clrMapOvr>
-  <p:timing>
-    <p:tnLst>
-      <p:par>
-        <p:cTn id="1" dur="indefinite" restart="never" nodeType="tmRoot"/>
-      </p:par>
-    </p:tnLst>
-  </p:timing>
 </p:sld>
 </file>
 
@@ -22102,10 +21931,9 @@
           <a:p>
             <a:pPr algn="ctr"/>
             <a:r>
-              <a:rPr lang="ru-RU" dirty="0" smtClean="0"/>
+              <a:rPr lang="ru-RU" dirty="0"/>
               <a:t>Вопросы для самоконтроля</a:t>
             </a:r>
-            <a:endParaRPr lang="ru-RU" dirty="0"/>
           </a:p>
         </p:txBody>
       </p:sp>
@@ -22137,30 +21965,29 @@
           </a:p>
           <a:p>
             <a:r>
-              <a:rPr lang="ru-RU" dirty="0" smtClean="0"/>
+              <a:rPr lang="ru-RU" dirty="0"/>
               <a:t>Приведите примеры ВР, соответствующие рискам надежности ВР. Какие при этом будут особенности остатков модели. Как можно выявить проблемы на метриках и как это скажется на бизнес-метриках.</a:t>
             </a:r>
           </a:p>
           <a:p>
             <a:r>
-              <a:rPr lang="ru-RU" dirty="0" smtClean="0"/>
+              <a:rPr lang="ru-RU" dirty="0"/>
               <a:t>Проанализируйте ситуацию когда для одного ВР есть несколько допустимых методов предсказаний. Какие методы какую надежность дадут? Обоснуйте ответ.</a:t>
             </a:r>
           </a:p>
           <a:p>
             <a:r>
-              <a:rPr lang="ru-RU" dirty="0" smtClean="0"/>
+              <a:rPr lang="ru-RU" dirty="0"/>
               <a:t>Предложите </a:t>
             </a:r>
             <a:r>
-              <a:rPr lang="ru-RU" dirty="0" err="1" smtClean="0"/>
+              <a:rPr lang="ru-RU" dirty="0" err="1"/>
               <a:t>пайплайн</a:t>
             </a:r>
             <a:r>
-              <a:rPr lang="ru-RU" dirty="0" smtClean="0"/>
+              <a:rPr lang="ru-RU" dirty="0"/>
               <a:t> мониторинга работы метода предсказаний ВР. Как при этом будет надежность провялятся, какие будут риски для бизнес-метрик.</a:t>
             </a:r>
-            <a:endParaRPr lang="ru-RU" dirty="0"/>
           </a:p>
         </p:txBody>
       </p:sp>
@@ -22174,13 +22001,6 @@
   <p:clrMapOvr>
     <a:masterClrMapping/>
   </p:clrMapOvr>
-  <p:timing>
-    <p:tnLst>
-      <p:par>
-        <p:cTn id="1" dur="indefinite" restart="never" nodeType="tmRoot"/>
-      </p:par>
-    </p:tnLst>
-  </p:timing>
 </p:sld>
 </file>
 
@@ -22316,13 +22136,6 @@
   <p:clrMapOvr>
     <a:masterClrMapping/>
   </p:clrMapOvr>
-  <p:timing>
-    <p:tnLst>
-      <p:par>
-        <p:cTn id="1" dur="indefinite" restart="never" nodeType="tmRoot"/>
-      </p:par>
-    </p:tnLst>
-  </p:timing>
 </p:sld>
 </file>
 
@@ -22844,21 +22657,6 @@
   <p:clrMapOvr>
     <a:masterClrMapping/>
   </p:clrMapOvr>
-  <mc:AlternateContent xmlns:mc="http://schemas.openxmlformats.org/markup-compatibility/2006" xmlns:p14="http://schemas.microsoft.com/office/powerpoint/2010/main">
-    <mc:Choice Requires="p14">
-      <p:transition spd="slow" p14:dur="2000"/>
-    </mc:Choice>
-    <mc:Fallback xmlns="">
-      <p:transition spd="slow"/>
-    </mc:Fallback>
-  </mc:AlternateContent>
-  <p:timing>
-    <p:tnLst>
-      <p:par>
-        <p:cTn id="1" dur="indefinite" restart="never" nodeType="tmRoot"/>
-      </p:par>
-    </p:tnLst>
-  </p:timing>
 </p:sld>
 </file>
 
@@ -23050,14 +22848,6 @@
   <p:clrMapOvr>
     <a:masterClrMapping/>
   </p:clrMapOvr>
-  <mc:AlternateContent xmlns:mc="http://schemas.openxmlformats.org/markup-compatibility/2006" xmlns:p14="http://schemas.microsoft.com/office/powerpoint/2010/main">
-    <mc:Choice Requires="p14">
-      <p:transition spd="slow" p14:dur="2000"/>
-    </mc:Choice>
-    <mc:Fallback xmlns="">
-      <p:transition spd="slow"/>
-    </mc:Fallback>
-  </mc:AlternateContent>
 </p:sld>
 </file>
 
@@ -23137,12 +22927,6 @@
           </a:bodyPr>
           <a:lstStyle/>
           <a:p>
-            <a:r>
-              <a:rPr lang="en-US" b="1" dirty="0">
-                <a:latin typeface="Inter"/>
-              </a:rPr>
-              <a:t/>
-            </a:r>
             <a:br>
               <a:rPr lang="en-US" b="1" dirty="0">
                 <a:latin typeface="Inter"/>
@@ -23255,14 +23039,6 @@
   <p:clrMapOvr>
     <a:masterClrMapping/>
   </p:clrMapOvr>
-  <mc:AlternateContent xmlns:mc="http://schemas.openxmlformats.org/markup-compatibility/2006" xmlns:p14="http://schemas.microsoft.com/office/powerpoint/2010/main">
-    <mc:Choice Requires="p14">
-      <p:transition spd="slow" p14:dur="2000"/>
-    </mc:Choice>
-    <mc:Fallback xmlns="">
-      <p:transition spd="slow"/>
-    </mc:Fallback>
-  </mc:AlternateContent>
 </p:sld>
 </file>
 
@@ -23543,14 +23319,6 @@
   <p:clrMapOvr>
     <a:masterClrMapping/>
   </p:clrMapOvr>
-  <mc:AlternateContent xmlns:mc="http://schemas.openxmlformats.org/markup-compatibility/2006" xmlns:p14="http://schemas.microsoft.com/office/powerpoint/2010/main">
-    <mc:Choice Requires="p14">
-      <p:transition spd="slow" p14:dur="2000"/>
-    </mc:Choice>
-    <mc:Fallback xmlns="">
-      <p:transition spd="slow"/>
-    </mc:Fallback>
-  </mc:AlternateContent>
 </p:sld>
 </file>
 
@@ -24203,13 +23971,6 @@
   <p:clrMapOvr>
     <a:masterClrMapping/>
   </p:clrMapOvr>
-  <p:timing>
-    <p:tnLst>
-      <p:par>
-        <p:cTn id="1" dur="indefinite" restart="never" nodeType="tmRoot"/>
-      </p:par>
-    </p:tnLst>
-  </p:timing>
 </p:sld>
 </file>
 
@@ -24775,13 +24536,6 @@
   <p:clrMapOvr>
     <a:masterClrMapping/>
   </p:clrMapOvr>
-  <p:timing>
-    <p:tnLst>
-      <p:par>
-        <p:cTn id="1" dur="indefinite" restart="never" nodeType="tmRoot"/>
-      </p:par>
-    </p:tnLst>
-  </p:timing>
 </p:sld>
 </file>
 
@@ -25146,13 +24900,6 @@
   <p:clrMapOvr>
     <a:masterClrMapping/>
   </p:clrMapOvr>
-  <p:timing>
-    <p:tnLst>
-      <p:par>
-        <p:cTn id="1" dur="indefinite" restart="never" nodeType="tmRoot"/>
-      </p:par>
-    </p:tnLst>
-  </p:timing>
 </p:sld>
 </file>
 
@@ -25563,13 +25310,6 @@
   <p:clrMapOvr>
     <a:masterClrMapping/>
   </p:clrMapOvr>
-  <p:timing>
-    <p:tnLst>
-      <p:par>
-        <p:cTn id="1" dur="indefinite" restart="never" nodeType="tmRoot"/>
-      </p:par>
-    </p:tnLst>
-  </p:timing>
 </p:sld>
 </file>
 
@@ -25922,13 +25662,6 @@
   <p:clrMapOvr>
     <a:masterClrMapping/>
   </p:clrMapOvr>
-  <p:timing>
-    <p:tnLst>
-      <p:par>
-        <p:cTn id="1" dur="indefinite" restart="never" nodeType="tmRoot"/>
-      </p:par>
-    </p:tnLst>
-  </p:timing>
 </p:sld>
 </file>
 
@@ -26177,10 +25910,6 @@
               <a:rPr lang="en-US" sz="2400" u="sng" dirty="0"/>
               <a:t>!</a:t>
             </a:r>
-            <a:r>
-              <a:rPr lang="ru-RU" sz="2600" dirty="0"/>
-              <a:t/>
-            </a:r>
             <a:br>
               <a:rPr lang="ru-RU" sz="2600" dirty="0"/>
             </a:br>
@@ -26280,13 +26009,6 @@
   <p:clrMapOvr>
     <a:masterClrMapping/>
   </p:clrMapOvr>
-  <p:timing>
-    <p:tnLst>
-      <p:par>
-        <p:cTn id="1" dur="indefinite" restart="never" nodeType="tmRoot"/>
-      </p:par>
-    </p:tnLst>
-  </p:timing>
 </p:sld>
 </file>
 
@@ -27101,13 +26823,6 @@
   <p:clrMapOvr>
     <a:masterClrMapping/>
   </p:clrMapOvr>
-  <p:timing>
-    <p:tnLst>
-      <p:par>
-        <p:cTn id="1" dur="indefinite" restart="never" nodeType="tmRoot"/>
-      </p:par>
-    </p:tnLst>
-  </p:timing>
 </p:sld>
 </file>
 
